--- a/docs/VANI_Finetune_Presentation_v6.pptx
+++ b/docs/VANI_Finetune_Presentation_v6.pptx
@@ -19388,6 +19388,372 @@
             <a:avLst/>
           </a:prstGeom>
           <a:solidFill>
+            <a:srgbClr val="546E7A"/>
+          </a:solidFill>
+          <a:ln w="9525">
+            <a:noFill/>
+          </a:ln>
+        </p:spPr>
+        <p:style>
+          <a:lnRef idx="1">
+            <a:schemeClr val="accent1"/>
+          </a:lnRef>
+          <a:fillRef idx="3">
+            <a:schemeClr val="accent1"/>
+          </a:fillRef>
+          <a:effectRef idx="2">
+            <a:schemeClr val="accent1"/>
+          </a:effectRef>
+          <a:fontRef idx="minor">
+            <a:schemeClr val="lt1"/>
+          </a:fontRef>
+        </p:style>
+        <p:txBody>
+          <a:bodyPr rtlCol="0" anchor="ctr"/>
+          <a:lstStyle/>
+          <a:p>
+            <a:pPr algn="ctr"/>
+          </a:p>
+        </p:txBody>
+      </p:sp>
+      <p:sp>
+        <p:nvSpPr>
+          <p:cNvPr id="90" name="TextBox 89"/>
+          <p:cNvSpPr txBox="1"/>
+          <p:nvPr/>
+        </p:nvSpPr>
+        <p:spPr>
+          <a:xfrm>
+            <a:off x="274320" y="5477255"/>
+            <a:ext cx="1371600" cy="256032"/>
+          </a:xfrm>
+          <a:prstGeom prst="rect">
+            <a:avLst/>
+          </a:prstGeom>
+          <a:noFill/>
+        </p:spPr>
+        <p:txBody>
+          <a:bodyPr wrap="square">
+            <a:spAutoFit/>
+          </a:bodyPr>
+          <a:lstStyle/>
+          <a:p>
+            <a:pPr algn="l"/>
+            <a:r>
+              <a:rPr sz="950" b="1" i="0">
+                <a:solidFill>
+                  <a:srgbClr val="212121"/>
+                </a:solidFill>
+                <a:latin typeface="Times New Roman"/>
+              </a:rPr>
+              <a:t>doi_iv</a:t>
+            </a:r>
+          </a:p>
+        </p:txBody>
+      </p:sp>
+      <p:sp>
+        <p:nvSpPr>
+          <p:cNvPr id="91" name="TextBox 90"/>
+          <p:cNvSpPr txBox="1"/>
+          <p:nvPr/>
+        </p:nvSpPr>
+        <p:spPr>
+          <a:xfrm>
+            <a:off x="1463040" y="5477255"/>
+            <a:ext cx="1371600" cy="256032"/>
+          </a:xfrm>
+          <a:prstGeom prst="rect">
+            <a:avLst/>
+          </a:prstGeom>
+          <a:noFill/>
+        </p:spPr>
+        <p:txBody>
+          <a:bodyPr wrap="square">
+            <a:spAutoFit/>
+          </a:bodyPr>
+          <a:lstStyle/>
+          <a:p>
+            <a:pPr algn="l"/>
+            <a:r>
+              <a:rPr sz="950" b="0" i="0">
+                <a:solidFill>
+                  <a:srgbClr val="546E7A"/>
+                </a:solidFill>
+                <a:latin typeface="Times New Roman"/>
+              </a:rPr>
+              <a:t>Dogri</a:t>
+            </a:r>
+          </a:p>
+        </p:txBody>
+      </p:sp>
+      <p:sp>
+        <p:nvSpPr>
+          <p:cNvPr id="92" name="TextBox 91"/>
+          <p:cNvSpPr txBox="1"/>
+          <p:nvPr/>
+        </p:nvSpPr>
+        <p:spPr>
+          <a:xfrm>
+            <a:off x="2788920" y="5477255"/>
+            <a:ext cx="3657600" cy="256032"/>
+          </a:xfrm>
+          <a:prstGeom prst="rect">
+            <a:avLst/>
+          </a:prstGeom>
+          <a:noFill/>
+        </p:spPr>
+        <p:txBody>
+          <a:bodyPr wrap="square">
+            <a:spAutoFit/>
+          </a:bodyPr>
+          <a:lstStyle/>
+          <a:p>
+            <a:pPr algn="l"/>
+            <a:r>
+              <a:rPr sz="950" b="0" i="0">
+                <a:solidFill>
+                  <a:srgbClr val="546E7A"/>
+                </a:solidFill>
+                <a:latin typeface="Times New Roman"/>
+              </a:rPr>
+              <a:t>IndicVoices-R Dogri — 97 shards, 43.8 GB</a:t>
+            </a:r>
+          </a:p>
+        </p:txBody>
+      </p:sp>
+      <p:sp>
+        <p:nvSpPr>
+          <p:cNvPr id="93" name="TextBox 92"/>
+          <p:cNvSpPr txBox="1"/>
+          <p:nvPr/>
+        </p:nvSpPr>
+        <p:spPr>
+          <a:xfrm>
+            <a:off x="6537960" y="5477255"/>
+            <a:ext cx="1371600" cy="256032"/>
+          </a:xfrm>
+          <a:prstGeom prst="rect">
+            <a:avLst/>
+          </a:prstGeom>
+          <a:noFill/>
+        </p:spPr>
+        <p:txBody>
+          <a:bodyPr wrap="square">
+            <a:spAutoFit/>
+          </a:bodyPr>
+          <a:lstStyle/>
+          <a:p>
+            <a:pPr algn="l"/>
+            <a:r>
+              <a:rPr sz="950" b="0" i="0">
+                <a:solidFill>
+                  <a:srgbClr val="546E7A"/>
+                </a:solidFill>
+                <a:latin typeface="Times New Roman"/>
+              </a:rPr>
+              <a:t>128</a:t>
+            </a:r>
+          </a:p>
+        </p:txBody>
+      </p:sp>
+      <p:sp>
+        <p:nvSpPr>
+          <p:cNvPr id="94" name="TextBox 93"/>
+          <p:cNvSpPr txBox="1"/>
+          <p:nvPr/>
+        </p:nvSpPr>
+        <p:spPr>
+          <a:xfrm>
+            <a:off x="7360920" y="5477255"/>
+            <a:ext cx="1371600" cy="256032"/>
+          </a:xfrm>
+          <a:prstGeom prst="rect">
+            <a:avLst/>
+          </a:prstGeom>
+          <a:noFill/>
+        </p:spPr>
+        <p:txBody>
+          <a:bodyPr wrap="square">
+            <a:spAutoFit/>
+          </a:bodyPr>
+          <a:lstStyle/>
+          <a:p>
+            <a:pPr algn="l"/>
+            <a:r>
+              <a:rPr sz="950" b="0" i="0">
+                <a:solidFill>
+                  <a:srgbClr val="546E7A"/>
+                </a:solidFill>
+                <a:latin typeface="Times New Roman"/>
+              </a:rPr>
+              <a:t>A6000 48 GB ☁</a:t>
+            </a:r>
+          </a:p>
+        </p:txBody>
+      </p:sp>
+      <p:sp>
+        <p:nvSpPr>
+          <p:cNvPr id="95" name="TextBox 94"/>
+          <p:cNvSpPr txBox="1"/>
+          <p:nvPr/>
+        </p:nvSpPr>
+        <p:spPr>
+          <a:xfrm>
+            <a:off x="8915400" y="5477255"/>
+            <a:ext cx="1371600" cy="256032"/>
+          </a:xfrm>
+          <a:prstGeom prst="rect">
+            <a:avLst/>
+          </a:prstGeom>
+          <a:noFill/>
+        </p:spPr>
+        <p:txBody>
+          <a:bodyPr wrap="square">
+            <a:spAutoFit/>
+          </a:bodyPr>
+          <a:lstStyle/>
+          <a:p>
+            <a:pPr algn="l"/>
+            <a:r>
+              <a:rPr sz="950" b="0" i="0">
+                <a:solidFill>
+                  <a:srgbClr val="546E7A"/>
+                </a:solidFill>
+                <a:latin typeface="Times New Roman"/>
+              </a:rPr>
+              <a:t>~6 h</a:t>
+            </a:r>
+          </a:p>
+        </p:txBody>
+      </p:sp>
+      <p:sp>
+        <p:nvSpPr>
+          <p:cNvPr id="96" name="TextBox 95"/>
+          <p:cNvSpPr txBox="1"/>
+          <p:nvPr/>
+        </p:nvSpPr>
+        <p:spPr>
+          <a:xfrm>
+            <a:off x="10012680" y="5477255"/>
+            <a:ext cx="1371600" cy="256032"/>
+          </a:xfrm>
+          <a:prstGeom prst="rect">
+            <a:avLst/>
+          </a:prstGeom>
+          <a:noFill/>
+        </p:spPr>
+        <p:txBody>
+          <a:bodyPr wrap="square">
+            <a:spAutoFit/>
+          </a:bodyPr>
+          <a:lstStyle/>
+          <a:p>
+            <a:pPr algn="l"/>
+            <a:r>
+              <a:rPr sz="950" b="1" i="0">
+                <a:solidFill>
+                  <a:srgbClr val="546E7A"/>
+                </a:solidFill>
+                <a:latin typeface="Times New Roman"/>
+              </a:rPr>
+              <a:t>50.07%</a:t>
+            </a:r>
+          </a:p>
+        </p:txBody>
+      </p:sp>
+      <p:sp>
+        <p:nvSpPr>
+          <p:cNvPr id="97" name="TextBox 96"/>
+          <p:cNvSpPr txBox="1"/>
+          <p:nvPr/>
+        </p:nvSpPr>
+        <p:spPr>
+          <a:xfrm>
+            <a:off x="11018520" y="5477255"/>
+            <a:ext cx="1371600" cy="256032"/>
+          </a:xfrm>
+          <a:prstGeom prst="rect">
+            <a:avLst/>
+          </a:prstGeom>
+          <a:noFill/>
+        </p:spPr>
+        <p:txBody>
+          <a:bodyPr wrap="square">
+            <a:spAutoFit/>
+          </a:bodyPr>
+          <a:lstStyle/>
+          <a:p>
+            <a:pPr algn="l"/>
+            <a:r>
+              <a:rPr sz="950" b="1" i="0">
+                <a:solidFill>
+                  <a:srgbClr val="546E7A"/>
+                </a:solidFill>
+                <a:latin typeface="Times New Roman"/>
+              </a:rPr>
+              <a:t>cut short</a:t>
+            </a:r>
+          </a:p>
+        </p:txBody>
+      </p:sp>
+      <p:sp>
+        <p:nvSpPr>
+          <p:cNvPr id="98" name="Rectangle 97"/>
+          <p:cNvSpPr/>
+          <p:nvPr/>
+        </p:nvSpPr>
+        <p:spPr>
+          <a:xfrm>
+            <a:off x="256032" y="5806440"/>
+            <a:ext cx="11676888" cy="402336"/>
+          </a:xfrm>
+          <a:prstGeom prst="rect">
+            <a:avLst/>
+          </a:prstGeom>
+          <a:solidFill>
+            <a:srgbClr val="F0F4FF"/>
+          </a:solidFill>
+          <a:ln w="9525">
+            <a:noFill/>
+          </a:ln>
+        </p:spPr>
+        <p:style>
+          <a:lnRef idx="1">
+            <a:schemeClr val="accent1"/>
+          </a:lnRef>
+          <a:fillRef idx="3">
+            <a:schemeClr val="accent1"/>
+          </a:fillRef>
+          <a:effectRef idx="2">
+            <a:schemeClr val="accent1"/>
+          </a:effectRef>
+          <a:fontRef idx="minor">
+            <a:schemeClr val="lt1"/>
+          </a:fontRef>
+        </p:style>
+        <p:txBody>
+          <a:bodyPr rtlCol="0" anchor="ctr"/>
+          <a:lstStyle/>
+          <a:p>
+            <a:pPr algn="ctr"/>
+          </a:p>
+        </p:txBody>
+      </p:sp>
+      <p:sp>
+        <p:nvSpPr>
+          <p:cNvPr id="99" name="Rectangle 98"/>
+          <p:cNvSpPr/>
+          <p:nvPr/>
+        </p:nvSpPr>
+        <p:spPr>
+          <a:xfrm>
+            <a:off x="256032" y="5806440"/>
+            <a:ext cx="50292" cy="402336"/>
+          </a:xfrm>
+          <a:prstGeom prst="rect">
+            <a:avLst/>
+          </a:prstGeom>
+          <a:solidFill>
             <a:srgbClr val="2E7D32"/>
           </a:solidFill>
           <a:ln w="9525">
@@ -19418,13 +19784,13 @@
       </p:sp>
       <p:sp>
         <p:nvSpPr>
-          <p:cNvPr id="90" name="TextBox 89"/>
-          <p:cNvSpPr txBox="1"/>
-          <p:nvPr/>
-        </p:nvSpPr>
-        <p:spPr>
-          <a:xfrm>
-            <a:off x="274320" y="5477255"/>
+          <p:cNvPr id="100" name="TextBox 99"/>
+          <p:cNvSpPr txBox="1"/>
+          <p:nvPr/>
+        </p:nvSpPr>
+        <p:spPr>
+          <a:xfrm>
+            <a:off x="274320" y="5897879"/>
             <a:ext cx="1371600" cy="256032"/>
           </a:xfrm>
           <a:prstGeom prst="rect">
@@ -19446,20 +19812,20 @@
                 </a:solidFill>
                 <a:latin typeface="Times New Roman"/>
               </a:rPr>
-              <a:t>doi_iv</a:t>
-            </a:r>
-          </a:p>
-        </p:txBody>
-      </p:sp>
-      <p:sp>
-        <p:nvSpPr>
-          <p:cNvPr id="91" name="TextBox 90"/>
-          <p:cNvSpPr txBox="1"/>
-          <p:nvPr/>
-        </p:nvSpPr>
-        <p:spPr>
-          <a:xfrm>
-            <a:off x="1463040" y="5477255"/>
+              <a:t>doi_iv2</a:t>
+            </a:r>
+          </a:p>
+        </p:txBody>
+      </p:sp>
+      <p:sp>
+        <p:nvSpPr>
+          <p:cNvPr id="101" name="TextBox 100"/>
+          <p:cNvSpPr txBox="1"/>
+          <p:nvPr/>
+        </p:nvSpPr>
+        <p:spPr>
+          <a:xfrm>
+            <a:off x="1463040" y="5897879"/>
             <a:ext cx="1371600" cy="256032"/>
           </a:xfrm>
           <a:prstGeom prst="rect">
@@ -19488,13 +19854,13 @@
       </p:sp>
       <p:sp>
         <p:nvSpPr>
-          <p:cNvPr id="92" name="TextBox 91"/>
-          <p:cNvSpPr txBox="1"/>
-          <p:nvPr/>
-        </p:nvSpPr>
-        <p:spPr>
-          <a:xfrm>
-            <a:off x="2788920" y="5477255"/>
+          <p:cNvPr id="102" name="TextBox 101"/>
+          <p:cNvSpPr txBox="1"/>
+          <p:nvPr/>
+        </p:nvSpPr>
+        <p:spPr>
+          <a:xfrm>
+            <a:off x="2788920" y="5897879"/>
             <a:ext cx="3657600" cy="256032"/>
           </a:xfrm>
           <a:prstGeom prst="rect">
@@ -19516,20 +19882,20 @@
                 </a:solidFill>
                 <a:latin typeface="Times New Roman"/>
               </a:rPr>
-              <a:t>IndicVoices-R Dogri — 97 shards, 43.8 GB</a:t>
-            </a:r>
-          </a:p>
-        </p:txBody>
-      </p:sp>
-      <p:sp>
-        <p:nvSpPr>
-          <p:cNvPr id="93" name="TextBox 92"/>
-          <p:cNvSpPr txBox="1"/>
-          <p:nvPr/>
-        </p:nvSpPr>
-        <p:spPr>
-          <a:xfrm>
-            <a:off x="6537960" y="5477255"/>
+              <a:t>as doi_iv, fresh LR schedule, 9,000 steps</a:t>
+            </a:r>
+          </a:p>
+        </p:txBody>
+      </p:sp>
+      <p:sp>
+        <p:nvSpPr>
+          <p:cNvPr id="103" name="TextBox 102"/>
+          <p:cNvSpPr txBox="1"/>
+          <p:nvPr/>
+        </p:nvSpPr>
+        <p:spPr>
+          <a:xfrm>
+            <a:off x="6537960" y="5897879"/>
             <a:ext cx="1371600" cy="256032"/>
           </a:xfrm>
           <a:prstGeom prst="rect">
@@ -19558,13 +19924,13 @@
       </p:sp>
       <p:sp>
         <p:nvSpPr>
-          <p:cNvPr id="94" name="TextBox 93"/>
-          <p:cNvSpPr txBox="1"/>
-          <p:nvPr/>
-        </p:nvSpPr>
-        <p:spPr>
-          <a:xfrm>
-            <a:off x="7360920" y="5477255"/>
+          <p:cNvPr id="104" name="TextBox 103"/>
+          <p:cNvSpPr txBox="1"/>
+          <p:nvPr/>
+        </p:nvSpPr>
+        <p:spPr>
+          <a:xfrm>
+            <a:off x="7360920" y="5897879"/>
             <a:ext cx="1371600" cy="256032"/>
           </a:xfrm>
           <a:prstGeom prst="rect">
@@ -19593,13 +19959,13 @@
       </p:sp>
       <p:sp>
         <p:nvSpPr>
-          <p:cNvPr id="95" name="TextBox 94"/>
-          <p:cNvSpPr txBox="1"/>
-          <p:nvPr/>
-        </p:nvSpPr>
-        <p:spPr>
-          <a:xfrm>
-            <a:off x="8915400" y="5477255"/>
+          <p:cNvPr id="105" name="TextBox 104"/>
+          <p:cNvSpPr txBox="1"/>
+          <p:nvPr/>
+        </p:nvSpPr>
+        <p:spPr>
+          <a:xfrm>
+            <a:off x="8915400" y="5897879"/>
             <a:ext cx="1371600" cy="256032"/>
           </a:xfrm>
           <a:prstGeom prst="rect">
@@ -19621,20 +19987,20 @@
                 </a:solidFill>
                 <a:latin typeface="Times New Roman"/>
               </a:rPr>
-              <a:t>~6 h</a:t>
-            </a:r>
-          </a:p>
-        </p:txBody>
-      </p:sp>
-      <p:sp>
-        <p:nvSpPr>
-          <p:cNvPr id="96" name="TextBox 95"/>
-          <p:cNvSpPr txBox="1"/>
-          <p:nvPr/>
-        </p:nvSpPr>
-        <p:spPr>
-          <a:xfrm>
-            <a:off x="10012680" y="5477255"/>
+              <a:t>~9 h</a:t>
+            </a:r>
+          </a:p>
+        </p:txBody>
+      </p:sp>
+      <p:sp>
+        <p:nvSpPr>
+          <p:cNvPr id="106" name="TextBox 105"/>
+          <p:cNvSpPr txBox="1"/>
+          <p:nvPr/>
+        </p:nvSpPr>
+        <p:spPr>
+          <a:xfrm>
+            <a:off x="10012680" y="5897879"/>
             <a:ext cx="1371600" cy="256032"/>
           </a:xfrm>
           <a:prstGeom prst="rect">
@@ -19656,20 +20022,20 @@
                 </a:solidFill>
                 <a:latin typeface="Times New Roman"/>
               </a:rPr>
-              <a:t>50.07%</a:t>
-            </a:r>
-          </a:p>
-        </p:txBody>
-      </p:sp>
-      <p:sp>
-        <p:nvSpPr>
-          <p:cNvPr id="97" name="TextBox 96"/>
-          <p:cNvSpPr txBox="1"/>
-          <p:nvPr/>
-        </p:nvSpPr>
-        <p:spPr>
-          <a:xfrm>
-            <a:off x="11018520" y="5477255"/>
+              <a:t>46.73%</a:t>
+            </a:r>
+          </a:p>
+        </p:txBody>
+      </p:sp>
+      <p:sp>
+        <p:nvSpPr>
+          <p:cNvPr id="107" name="TextBox 106"/>
+          <p:cNvSpPr txBox="1"/>
+          <p:nvPr/>
+        </p:nvSpPr>
+        <p:spPr>
+          <a:xfrm>
+            <a:off x="11018520" y="5897879"/>
             <a:ext cx="1371600" cy="256032"/>
           </a:xfrm>
           <a:prstGeom prst="rect">
@@ -19691,20 +20057,20 @@
                 </a:solidFill>
                 <a:latin typeface="Times New Roman"/>
               </a:rPr>
-              <a:t>1st model</a:t>
-            </a:r>
-          </a:p>
-        </p:txBody>
-      </p:sp>
-      <p:sp>
-        <p:nvSpPr>
-          <p:cNvPr id="98" name="TextBox 97"/>
-          <p:cNvSpPr txBox="1"/>
-          <p:nvPr/>
-        </p:nvSpPr>
-        <p:spPr>
-          <a:xfrm>
-            <a:off x="365760" y="5943600"/>
+              <a:t>BEST</a:t>
+            </a:r>
+          </a:p>
+        </p:txBody>
+      </p:sp>
+      <p:sp>
+        <p:nvSpPr>
+          <p:cNvPr id="108" name="TextBox 107"/>
+          <p:cNvSpPr txBox="1"/>
+          <p:nvPr/>
+        </p:nvSpPr>
+        <p:spPr>
+          <a:xfrm>
+            <a:off x="365760" y="6364224"/>
             <a:ext cx="11430000" cy="274320"/>
           </a:xfrm>
           <a:prstGeom prst="rect">
@@ -19733,13 +20099,13 @@
       </p:sp>
       <p:sp>
         <p:nvSpPr>
-          <p:cNvPr id="99" name="TextBox 98"/>
-          <p:cNvSpPr txBox="1"/>
-          <p:nvPr/>
-        </p:nvSpPr>
-        <p:spPr>
-          <a:xfrm>
-            <a:off x="365760" y="6199632"/>
+          <p:cNvPr id="109" name="TextBox 108"/>
+          <p:cNvSpPr txBox="1"/>
+          <p:nvPr/>
+        </p:nvSpPr>
+        <p:spPr>
+          <a:xfrm>
+            <a:off x="365760" y="6620256"/>
             <a:ext cx="11430000" cy="274320"/>
           </a:xfrm>
           <a:prstGeom prst="rect">
@@ -19768,13 +20134,13 @@
       </p:sp>
       <p:sp>
         <p:nvSpPr>
-          <p:cNvPr id="100" name="TextBox 99"/>
-          <p:cNvSpPr txBox="1"/>
-          <p:nvPr/>
-        </p:nvSpPr>
-        <p:spPr>
-          <a:xfrm>
-            <a:off x="365760" y="6455664"/>
+          <p:cNvPr id="110" name="TextBox 109"/>
+          <p:cNvSpPr txBox="1"/>
+          <p:nvPr/>
+        </p:nvSpPr>
+        <p:spPr>
+          <a:xfrm>
+            <a:off x="365760" y="6876288"/>
             <a:ext cx="11430000" cy="274320"/>
           </a:xfrm>
           <a:prstGeom prst="rect">
@@ -19803,13 +20169,13 @@
       </p:sp>
       <p:sp>
         <p:nvSpPr>
-          <p:cNvPr id="101" name="TextBox 100"/>
-          <p:cNvSpPr txBox="1"/>
-          <p:nvPr/>
-        </p:nvSpPr>
-        <p:spPr>
-          <a:xfrm>
-            <a:off x="365760" y="6711696"/>
+          <p:cNvPr id="111" name="TextBox 110"/>
+          <p:cNvSpPr txBox="1"/>
+          <p:nvPr/>
+        </p:nvSpPr>
+        <p:spPr>
+          <a:xfrm>
+            <a:off x="365760" y="7132320"/>
             <a:ext cx="11430000" cy="274320"/>
           </a:xfrm>
           <a:prstGeom prst="rect">
@@ -27846,7 +28212,7 @@
 border languages (Punjabi, Pashto, Urdu,
 Nepali, Mandarin, Hindi, Kashmiri, Dogri).
 All eight now have fine-tuned ASR - Dogri was
-the last, added 2026-07-28 (102.25 -&gt; 50.07).</a:t>
+the last, added 2026-07-28 (102.25 -&gt; 46.73).</a:t>
             </a:r>
           </a:p>
         </p:txBody>

--- a/docs/VANI_Finetune_Presentation_v6.pptx
+++ b/docs/VANI_Finetune_Presentation_v6.pptx
@@ -9105,7 +9105,7 @@
                 </a:solidFill>
                 <a:latin typeface="Times New Roman"/>
               </a:rPr>
-              <a:t>Kashmiri (ks)</a:t>
+              <a:t>Kashmiri (ks)‡</a:t>
             </a:r>
           </a:p>
         </p:txBody>
@@ -9175,7 +9175,7 @@
                 </a:solidFill>
                 <a:latin typeface="Times New Roman"/>
               </a:rPr>
-              <a:t> 96.87</a:t>
+              <a:t>     —</a:t>
             </a:r>
           </a:p>
         </p:txBody>
@@ -9210,7 +9210,7 @@
                 </a:solidFill>
                 <a:latin typeface="Times New Roman"/>
               </a:rPr>
-              <a:t>74.02</a:t>
+              <a:t>65.19</a:t>
             </a:r>
           </a:p>
         </p:txBody>
@@ -9245,7 +9245,7 @@
                 </a:solidFill>
                 <a:latin typeface="Times New Roman"/>
               </a:rPr>
-              <a:t>— (no supp.)</a:t>
+              <a:t>50.26</a:t>
             </a:r>
           </a:p>
         </p:txBody>
@@ -9274,13 +9274,13 @@
           <a:p>
             <a:pPr algn="l"/>
             <a:r>
-              <a:rPr sz="850" b="1" i="0">
-                <a:solidFill>
-                  <a:srgbClr val="00796B"/>
-                </a:solidFill>
-                <a:latin typeface="Times New Roman"/>
-              </a:rPr>
-              <a:t>FT Whsp ✓</a:t>
+              <a:rPr sz="850" b="0" i="0">
+                <a:solidFill>
+                  <a:srgbClr val="546E7A"/>
+                </a:solidFill>
+                <a:latin typeface="Times New Roman"/>
+              </a:rPr>
+              <a:t>SM4T+tok</a:t>
             </a:r>
           </a:p>
         </p:txBody>
@@ -9420,7 +9420,7 @@
                 </a:solidFill>
                 <a:latin typeface="Times New Roman"/>
               </a:rPr>
-              <a:t>Zero-shot SeamlessM4T wins ASR for pa / ne / hi / ur / zh. Pashto and Kashmiri were fine-tuned Whisper's last strongholds; both fell in 2026-07 to SeamlessM4T LoRA adapters (ps: noise-augmented training; ks: r=32 LoRA + a trainable __kas__ embedding row, plus a scoring-ruler correction — see notes). VANI now routes all 7 languages to SeamlessM4T; FT Whisper models are retained on disk for rollback only.</a:t>
+              <a:t>Zero-shot SeamlessM4T wins ASR for pa / ne / hi / ur / zh. Pashto and Kashmiri were fine-tuned Whisper's last strongholds; both fell in 2026-07 to SeamlessM4T LoRA adapters (ps: noise-augmented training; ks: a trainable __kas__ embedding row, rank 128 and a 20-character vocabulary repair, plus a scoring-ruler correction — see notes). VANI now routes all 7 languages to SeamlessM4T; FT Whisper models are retained on disk for rollback only.   ‡ Kashmiri is absent from FLEURS: its two figures are the 372-clip IndicVoices-R test split at L2, not this table's FLEURS n=100 ruler, and are held-out rather than training-split. The two rulers are not comparable across a row.</a:t>
             </a:r>
           </a:p>
         </p:txBody>
@@ -16145,7 +16145,7 @@
                 </a:solidFill>
                 <a:latin typeface="Times New Roman"/>
               </a:rPr>
-              <a:t>All 7 languages route to SeamlessM4T. Kashmiri 74.02 → 50.26. What remains is a data/acoustic limit, not an optimisation one. Five scoring defects caught in total.</a:t>
+              <a:t>All 7 languages route to SeamlessM4T. Kashmiri 65.19 → 50.26 on one held-out L2 ruler. What remains is a data/acoustic limit, not an optimisation one. Five scoring defects caught in total.</a:t>
             </a:r>
           </a:p>
         </p:txBody>

--- a/docs/VANI_Finetune_Presentation_v6.pptx
+++ b/docs/VANI_Finetune_Presentation_v6.pptx
@@ -16440,7 +16440,7 @@
                 </a:solidFill>
                 <a:latin typeface="Times New Roman"/>
               </a:rPr>
-              <a:t>The Whisper phase cost ~100 laptop GPU-hours. The adapter campaign that replaced it was cheaper per win — the two production adapters that closed it cost ~$6 of rented cloud compute, total.</a:t>
+              <a:t>Measured, not estimated: THREE surviving Whisper runs alone came to 103 laptop GPU-hours, and 62% of that was periodic evaluation, not training. The 19 local adapter runs spent 4.7 h evaluating between them. The two production adapters that closed the campaign cost ~$6 of rented cloud compute, total.</a:t>
             </a:r>
           </a:p>
         </p:txBody>

--- a/docs/VANI_Finetune_Presentation_v6.pptx
+++ b/docs/VANI_Finetune_Presentation_v6.pptx
@@ -28212,7 +28212,7 @@
 border languages (Punjabi, Pashto, Urdu,
 Nepali, Mandarin, Hindi, Kashmiri, Dogri).
 All eight now have fine-tuned ASR - Dogri was
-the last, added 2026-07-28 (102.25 -&gt; 46.73).</a:t>
+the last, added 2026-07-28 (102.39 -&gt; 46.73).</a:t>
             </a:r>
           </a:p>
         </p:txBody>

--- a/docs/VANI_Finetune_Presentation_v6.pptx
+++ b/docs/VANI_Finetune_Presentation_v6.pptx
@@ -6105,8 +6105,8 @@
         </p:blipFill>
         <p:spPr>
           <a:xfrm>
-            <a:off x="1293876" y="1298448"/>
-            <a:ext cx="9601200" cy="4992823"/>
+            <a:off x="1933956" y="1298448"/>
+            <a:ext cx="8321040" cy="4909168"/>
           </a:xfrm>
           <a:prstGeom prst="rect">
             <a:avLst/>
@@ -6121,7 +6121,7 @@
         </p:nvSpPr>
         <p:spPr>
           <a:xfrm>
-            <a:off x="365760" y="6382711"/>
+            <a:off x="365760" y="6299056"/>
             <a:ext cx="11430000" cy="292608"/>
           </a:xfrm>
           <a:prstGeom prst="rect">
@@ -6143,7 +6143,7 @@
                 </a:solidFill>
                 <a:latin typeface="Times New Roman"/>
               </a:rPr>
-              <a:t>Deployed backend vs the fine-tuned Whisper model, per language (n=100 FLEURS held-out, same scorer). Every language improves; the arrow points to the deployed SeamlessM4T backend. Kashmiri is shown separately (different corpus + scoring ruler).</a:t>
+              <a:t>All eight languages. Every one improves; the arrow points to the deployed backend. The two bands are DIFFERENT TEST SETS — top six are FLEURS n=100; Kashmiri and Dogri are absent from FLEURS, so they are IndicVoices-R (n=372 / 425) at L2. Read the lower band down its own column, not across. Dogri's 102.4% is what the system actually did before it had a Dogri model — misrouted audio, more errors than reference words.</a:t>
             </a:r>
           </a:p>
         </p:txBody>
